--- a/media/resources/files/EkiOrunduuOnduktar_KOBOYTUU_BOLUU_UnaaJarysh_1q9C7TX.pptx
+++ b/media/resources/files/EkiOrunduuOnduktar_KOBOYTUU_BOLUU_UnaaJarysh_1q9C7TX.pptx
@@ -10428,7 +10428,7 @@
                   <a:schemeClr val="tx1"/>
                 </a:solidFill>
               </a:rPr>
-              <a:t>Answer</a:t>
+              <a:t>Жооп</a:t>
             </a:r>
           </a:p>
         </p:txBody>
@@ -11445,7 +11445,7 @@
                 <a:latin typeface="Impact" panose="020B0806030902050204" pitchFamily="34" charset="0"/>
                 <a:ea typeface="굴림" panose="020B0600000101010101" pitchFamily="34" charset="-127"/>
               </a:rPr>
-              <a:t>START</a:t>
+              <a:t>Башта</a:t>
             </a:r>
             <a:endParaRPr lang="en-US" altLang="en-US" sz="8862" dirty="0">
               <a:solidFill>
@@ -12765,7 +12765,7 @@
                 <a:ea typeface="+mn-ea"/>
                 <a:cs typeface="+mn-cs"/>
               </a:rPr>
-              <a:t>Турдуу пикирлер учун ыраазычылык билдиребиз.</a:t>
+              <a:t>Түрдүү пикирлер үчүн ыраазычылык билдиребиз.</a:t>
             </a:r>
           </a:p>
           <a:p>

--- a/media/resources/files/EkiOrunduuOnduktar_KOBOYTUU_BOLUU_UnaaJarysh_1q9C7TX.pptx
+++ b/media/resources/files/EkiOrunduuOnduktar_KOBOYTUU_BOLUU_UnaaJarysh_1q9C7TX.pptx
@@ -4178,7 +4178,7 @@
                 <a:ea typeface="+mn-ea"/>
                 <a:cs typeface="+mn-cs"/>
               </a:rPr>
-              <a:t>Суроону тандоо үчүн ак кутучаны басыңыз/тийиңиз. Тиешелүү суроого өтүү үчүн номерди басыңыз.</a:t>
+              <a:t>Суроону тандоо үчүн ак кутучаны басыңыз. Ошол суроого өтүү үчүн номерди басыңыз.</a:t>
             </a:r>
           </a:p>
           <a:p>
@@ -4250,7 +4250,7 @@
                 <a:ea typeface="+mn-ea"/>
                 <a:cs typeface="+mn-cs"/>
               </a:rPr>
-              <a:t>Команданын унаасын чыкылдатып, аны бир орун алдыга жылдырыңыз. Жеңүүчү анимация бар</a:t>
+              <a:t>Команданын унаасын басып, бир орун алдыга жылдырыңыз. Жеңгенде анимация чыгат.</a:t>
             </a:r>
           </a:p>
           <a:p>
@@ -5120,7 +5120,7 @@
                   <a:schemeClr val="tx1"/>
                 </a:solidFill>
               </a:rPr>
-              <a:t>0.078</a:t>
+              <a:t>0,078</a:t>
             </a:r>
           </a:p>
         </p:txBody>
@@ -5217,7 +5217,7 @@
             <a:pPr algn="ctr"/>
             <a:r>
               <a:rPr lang="en-GB" sz="9600" dirty="0"/>
-              <a:t>1.3 × 0.06</a:t>
+              <a:t>1,3 × 0,06</a:t>
             </a:r>
           </a:p>
         </p:txBody>
@@ -5814,7 +5814,7 @@
             <a:pPr algn="ctr"/>
             <a:r>
               <a:rPr lang="en-GB" sz="9600" dirty="0"/>
-              <a:t>3 ÷ 0.12</a:t>
+              <a:t>3 ÷ 0,12</a:t>
             </a:r>
           </a:p>
         </p:txBody>
@@ -6411,7 +6411,7 @@
             <a:pPr algn="ctr"/>
             <a:r>
               <a:rPr lang="en-GB" sz="9600" dirty="0"/>
-              <a:t>55.5 ÷ 1.5</a:t>
+              <a:t>55,5 ÷ 1,5</a:t>
             </a:r>
           </a:p>
         </p:txBody>
@@ -7008,7 +7008,7 @@
             <a:pPr algn="ctr"/>
             <a:r>
               <a:rPr lang="en-GB" sz="9600" dirty="0"/>
-              <a:t>21.32 ÷ 0.52</a:t>
+              <a:t>21,32 ÷ 0,52</a:t>
             </a:r>
           </a:p>
         </p:txBody>
@@ -7605,7 +7605,7 @@
             <a:pPr algn="ctr"/>
             <a:r>
               <a:rPr lang="en-GB" sz="9600" dirty="0"/>
-              <a:t>0.8 × 2.1</a:t>
+              <a:t>0,8 × 2,1</a:t>
             </a:r>
           </a:p>
         </p:txBody>
@@ -8202,7 +8202,7 @@
             <a:pPr algn="ctr"/>
             <a:r>
               <a:rPr lang="en-GB" sz="9600" dirty="0"/>
-              <a:t>12 ÷ 0.12</a:t>
+              <a:t>12 ÷ 0,12</a:t>
             </a:r>
           </a:p>
         </p:txBody>
@@ -8799,7 +8799,7 @@
             <a:pPr algn="ctr"/>
             <a:r>
               <a:rPr lang="en-GB" sz="9600" dirty="0"/>
-              <a:t>88.2 ÷ 1.4</a:t>
+              <a:t>88,2 ÷ 1,4</a:t>
             </a:r>
           </a:p>
         </p:txBody>
@@ -9299,7 +9299,7 @@
                   <a:schemeClr val="tx1"/>
                 </a:solidFill>
               </a:rPr>
-              <a:t>0.203</a:t>
+              <a:t>0,203</a:t>
             </a:r>
           </a:p>
         </p:txBody>
@@ -9396,7 +9396,7 @@
             <a:pPr algn="ctr"/>
             <a:r>
               <a:rPr lang="en-GB" sz="9600" dirty="0"/>
-              <a:t>0.7 × 0.29</a:t>
+              <a:t>0,7 × 0,29</a:t>
             </a:r>
           </a:p>
         </p:txBody>
@@ -9896,7 +9896,7 @@
                   <a:schemeClr val="tx1"/>
                 </a:solidFill>
               </a:rPr>
-              <a:t>2.88</a:t>
+              <a:t>2,88</a:t>
             </a:r>
           </a:p>
         </p:txBody>
@@ -9993,7 +9993,7 @@
             <a:pPr algn="ctr"/>
             <a:r>
               <a:rPr lang="en-GB" sz="9600" dirty="0"/>
-              <a:t>1.8 × 1.6</a:t>
+              <a:t>1,8 × 1,6</a:t>
             </a:r>
           </a:p>
         </p:txBody>
@@ -10585,7 +10585,7 @@
             <a:pPr algn="ctr"/>
             <a:r>
               <a:rPr lang="en-GB" sz="9600" dirty="0"/>
-              <a:t>7.2 ÷ 0.16</a:t>
+              <a:t>7,2 ÷ 0,16</a:t>
             </a:r>
           </a:p>
         </p:txBody>
@@ -12227,7 +12227,7 @@
                   <a:schemeClr val="tx1"/>
                 </a:solidFill>
               </a:rPr>
-              <a:t>0.0744</a:t>
+              <a:t>0,0744</a:t>
             </a:r>
           </a:p>
         </p:txBody>
@@ -12324,7 +12324,7 @@
             <a:pPr algn="ctr"/>
             <a:r>
               <a:rPr lang="en-GB" sz="9600" dirty="0"/>
-              <a:t>0.31 × 0.24</a:t>
+              <a:t>0,31 × 0,24</a:t>
             </a:r>
           </a:p>
         </p:txBody>
@@ -22250,7 +22250,7 @@
                   <a:schemeClr val="tx1"/>
                 </a:solidFill>
               </a:rPr>
-              <a:t>0.96</a:t>
+              <a:t>0,96</a:t>
             </a:r>
           </a:p>
         </p:txBody>
@@ -22347,7 +22347,7 @@
             <a:pPr algn="ctr"/>
             <a:r>
               <a:rPr lang="en-GB" sz="9600" dirty="0"/>
-              <a:t>1.6 × 0.6</a:t>
+              <a:t>1,6 × 0,6</a:t>
             </a:r>
           </a:p>
         </p:txBody>
@@ -22944,7 +22944,7 @@
             <a:pPr algn="ctr"/>
             <a:r>
               <a:rPr lang="en-GB" sz="9600" dirty="0"/>
-              <a:t>4.2 ÷ 0.15</a:t>
+              <a:t>4,2 ÷ 0,15</a:t>
             </a:r>
           </a:p>
         </p:txBody>
@@ -23444,7 +23444,7 @@
                   <a:schemeClr val="tx1"/>
                 </a:solidFill>
               </a:rPr>
-              <a:t>0.148</a:t>
+              <a:t>0,148</a:t>
             </a:r>
           </a:p>
         </p:txBody>
@@ -23541,7 +23541,7 @@
             <a:pPr algn="ctr"/>
             <a:r>
               <a:rPr lang="en-GB" sz="9600" dirty="0"/>
-              <a:t>0.37 × 0.4</a:t>
+              <a:t>0,37 × 0,4</a:t>
             </a:r>
           </a:p>
         </p:txBody>
@@ -24041,7 +24041,7 @@
                   <a:schemeClr val="tx1"/>
                 </a:solidFill>
               </a:rPr>
-              <a:t>0.0304</a:t>
+              <a:t>0,0304</a:t>
             </a:r>
           </a:p>
         </p:txBody>
@@ -24138,7 +24138,7 @@
             <a:pPr algn="ctr"/>
             <a:r>
               <a:rPr lang="en-GB" sz="9600" dirty="0"/>
-              <a:t>0.19 × 0.16</a:t>
+              <a:t>0,19 × 0,16</a:t>
             </a:r>
           </a:p>
         </p:txBody>
@@ -24735,7 +24735,7 @@
             <a:pPr algn="ctr"/>
             <a:r>
               <a:rPr lang="en-GB" sz="9600" dirty="0"/>
-              <a:t>7.68 ÷ 0.24</a:t>
+              <a:t>7,68 ÷ 0,24</a:t>
             </a:r>
           </a:p>
         </p:txBody>
